--- a/media/resources/BirOrunduuOnduktar/Onduktar_BirdenAzTuuraJeKata.pptx
+++ b/media/resources/BirOrunduuOnduktar/Onduktar_BirdenAzTuuraJeKata.pptx
@@ -1958,7 +1958,7 @@
                 <a:ea typeface="+mn-ea"/>
                 <a:cs typeface="+mn-cs"/>
               </a:rPr>
-              <a:t>Турдуу пикирлер учун ыраазычылык билдиребиз.</a:t>
+              <a:t>Турдуу пикирлер үчүн ыраазычылык билдиребиз.</a:t>
             </a:r>
           </a:p>
           <a:p>
@@ -3982,7 +3982,7 @@
             <a:pPr algn="ctr"/>
             <a:r>
               <a:rPr lang="en-GB" sz="3200" dirty="0"/>
-              <a:t>7 ÷ 0.1</a:t>
+              <a:t>7 ÷ 0,1</a:t>
             </a:r>
           </a:p>
         </p:txBody>
@@ -4139,7 +4139,7 @@
             <a:pPr algn="ctr"/>
             <a:r>
               <a:rPr lang="en-GB" sz="3200" dirty="0"/>
-              <a:t>6 ÷ 0.2</a:t>
+              <a:t>6 ÷ 0,2</a:t>
             </a:r>
           </a:p>
         </p:txBody>
@@ -4248,7 +4248,7 @@
             <a:pPr algn="ctr"/>
             <a:r>
               <a:rPr lang="en-GB" sz="3200" dirty="0"/>
-              <a:t>2.4 ÷ 0.2</a:t>
+              <a:t>2,4 ÷ 0,2</a:t>
             </a:r>
           </a:p>
         </p:txBody>
@@ -4357,7 +4357,7 @@
             <a:pPr algn="ctr"/>
             <a:r>
               <a:rPr lang="en-GB" sz="3200" dirty="0"/>
-              <a:t>12 ÷ 0.6 = 120 ÷ 6 = 20</a:t>
+              <a:t>12 ÷ 0,6 = 120 ÷ 6 = 20</a:t>
             </a:r>
           </a:p>
         </p:txBody>
@@ -4393,7 +4393,7 @@
             <a:pPr algn="ctr"/>
             <a:r>
               <a:rPr lang="en-GB" sz="3200" dirty="0"/>
-              <a:t>9 ÷ 0.5</a:t>
+              <a:t>9 ÷ 0,5</a:t>
             </a:r>
           </a:p>
         </p:txBody>
@@ -4502,7 +4502,7 @@
             <a:pPr algn="ctr"/>
             <a:r>
               <a:rPr lang="en-GB" sz="3200" dirty="0"/>
-              <a:t>4 ÷ 0.5 = 400 ÷ 5</a:t>
+              <a:t>4 ÷ 0,5 = 400 ÷ 5</a:t>
             </a:r>
           </a:p>
         </p:txBody>
@@ -4538,7 +4538,7 @@
             <a:pPr algn="ctr"/>
             <a:r>
               <a:rPr lang="en-GB" sz="3200" dirty="0"/>
-              <a:t>4 ÷ 0.8 = 5</a:t>
+              <a:t>4 ÷ 0,8 = 5</a:t>
             </a:r>
           </a:p>
         </p:txBody>
@@ -4574,7 +4574,7 @@
             <a:pPr algn="ctr"/>
             <a:r>
               <a:rPr lang="en-GB" sz="3200" dirty="0"/>
-              <a:t>36 ÷ 0.9 = 400</a:t>
+              <a:t>36 ÷ 0,9 = 400</a:t>
             </a:r>
           </a:p>
         </p:txBody>
@@ -4610,7 +4610,7 @@
             <a:pPr algn="ctr"/>
             <a:r>
               <a:rPr lang="en-GB" sz="3200" dirty="0"/>
-              <a:t>2 ÷ 0.25 = 200 ÷ 25 = 8 </a:t>
+              <a:t>2 ÷ 0,25 = 200 ÷ 25 = 8 </a:t>
             </a:r>
           </a:p>
         </p:txBody>
@@ -4646,7 +4646,7 @@
             <a:pPr algn="ctr"/>
             <a:r>
               <a:rPr lang="en-GB" sz="3200" dirty="0"/>
-              <a:t>15 ÷ 0.01 = 150</a:t>
+              <a:t>15 ÷ 0,01 = 150</a:t>
             </a:r>
           </a:p>
         </p:txBody>
@@ -4682,7 +4682,7 @@
             <a:pPr algn="ctr"/>
             <a:r>
               <a:rPr lang="en-GB" sz="3200" dirty="0"/>
-              <a:t>6 ÷ 0.02 = 200</a:t>
+              <a:t>6 ÷ 0,02 = 200</a:t>
             </a:r>
           </a:p>
         </p:txBody>
@@ -4718,7 +4718,7 @@
             <a:pPr algn="ctr"/>
             <a:r>
               <a:rPr lang="en-GB" sz="3200" dirty="0"/>
-              <a:t>5 ÷ 0.2 = 25</a:t>
+              <a:t>5 ÷ 0,2 = 25</a:t>
             </a:r>
           </a:p>
         </p:txBody>
@@ -5425,7 +5425,7 @@
             <a:pPr algn="ctr"/>
             <a:r>
               <a:rPr lang="en-GB" sz="3200" dirty="0"/>
-              <a:t>7 ÷ 0.1</a:t>
+              <a:t>7 ÷ 0,1</a:t>
             </a:r>
           </a:p>
         </p:txBody>
@@ -5652,7 +5652,7 @@
             <a:pPr algn="ctr"/>
             <a:r>
               <a:rPr lang="en-GB" sz="3200" dirty="0"/>
-              <a:t>6 ÷ 0.2</a:t>
+              <a:t>6 ÷ 0,2</a:t>
             </a:r>
           </a:p>
         </p:txBody>
@@ -5761,7 +5761,7 @@
             <a:pPr algn="ctr"/>
             <a:r>
               <a:rPr lang="en-GB" sz="3200" dirty="0"/>
-              <a:t>12 ÷ 0.6 = 120 ÷ 6 = 20</a:t>
+              <a:t>12 ÷ 0,6 = 120 ÷ 6 = 20</a:t>
             </a:r>
           </a:p>
         </p:txBody>
@@ -5797,7 +5797,7 @@
             <a:pPr algn="ctr"/>
             <a:r>
               <a:rPr lang="en-GB" sz="3200" dirty="0"/>
-              <a:t>9 ÷ 0.5</a:t>
+              <a:t>9 ÷ 0,5</a:t>
             </a:r>
           </a:p>
         </p:txBody>
@@ -5906,7 +5906,7 @@
             <a:pPr algn="ctr"/>
             <a:r>
               <a:rPr lang="en-GB" sz="3200" dirty="0"/>
-              <a:t>4 ÷ 0.5 = 400 ÷ 5</a:t>
+              <a:t>4 ÷ 0,5 = 400 ÷ 5</a:t>
             </a:r>
           </a:p>
         </p:txBody>
@@ -6047,7 +6047,7 @@
             <a:pPr algn="ctr"/>
             <a:r>
               <a:rPr lang="en-GB" sz="3200" dirty="0"/>
-              <a:t>5 ÷ 0.2 = 25</a:t>
+              <a:t>5 ÷ 0,2 = 25</a:t>
             </a:r>
           </a:p>
         </p:txBody>
@@ -7445,7 +7445,7 @@
             <a:pPr algn="ctr"/>
             <a:r>
               <a:rPr lang="en-GB" sz="3200" dirty="0"/>
-              <a:t>7 ÷ 0.1</a:t>
+              <a:t>7 ÷ 0,1</a:t>
             </a:r>
           </a:p>
         </p:txBody>
@@ -7672,7 +7672,7 @@
             <a:pPr algn="ctr"/>
             <a:r>
               <a:rPr lang="en-GB" sz="3200" dirty="0"/>
-              <a:t>6 ÷ 0.2</a:t>
+              <a:t>6 ÷ 0,2</a:t>
             </a:r>
           </a:p>
         </p:txBody>
@@ -7785,7 +7785,7 @@
             <a:pPr algn="ctr"/>
             <a:r>
               <a:rPr lang="en-GB" sz="3200" dirty="0"/>
-              <a:t>2.4 ÷ 0.2</a:t>
+              <a:t>2,4 ÷ 0,2</a:t>
             </a:r>
           </a:p>
         </p:txBody>
@@ -7894,7 +7894,7 @@
             <a:pPr algn="ctr"/>
             <a:r>
               <a:rPr lang="en-GB" sz="3200" dirty="0"/>
-              <a:t>12 ÷ 0.6 = 120 ÷ 6 = 20</a:t>
+              <a:t>12 ÷ 0,6 = 120 ÷ 6 = 20</a:t>
             </a:r>
           </a:p>
         </p:txBody>
@@ -7930,7 +7930,7 @@
             <a:pPr algn="ctr"/>
             <a:r>
               <a:rPr lang="en-GB" sz="3200" dirty="0"/>
-              <a:t>9 ÷ 0.5</a:t>
+              <a:t>9 ÷ 0,5</a:t>
             </a:r>
           </a:p>
         </p:txBody>
@@ -8039,7 +8039,7 @@
             <a:pPr algn="ctr"/>
             <a:r>
               <a:rPr lang="en-GB" sz="3200" dirty="0"/>
-              <a:t>4 ÷ 0.5 = 400 ÷ 5</a:t>
+              <a:t>4 ÷ 0,5 = 400 ÷ 5</a:t>
             </a:r>
           </a:p>
         </p:txBody>
@@ -8075,7 +8075,7 @@
             <a:pPr algn="ctr"/>
             <a:r>
               <a:rPr lang="en-GB" sz="3200" dirty="0"/>
-              <a:t>4 ÷ 0.8 = 5</a:t>
+              <a:t>4 ÷ 0,8 = 5</a:t>
             </a:r>
           </a:p>
         </p:txBody>
@@ -8111,7 +8111,7 @@
             <a:pPr algn="ctr"/>
             <a:r>
               <a:rPr lang="en-GB" sz="3200" dirty="0"/>
-              <a:t>36 ÷ 0.9 = 400</a:t>
+              <a:t>36 ÷ 0,9 = 400</a:t>
             </a:r>
           </a:p>
         </p:txBody>
@@ -8147,7 +8147,7 @@
             <a:pPr algn="ctr"/>
             <a:r>
               <a:rPr lang="en-GB" sz="3200" dirty="0"/>
-              <a:t>2 ÷ 0.25 = 200 ÷ 25 = 8 </a:t>
+              <a:t>2 ÷ 0,25 = 200 ÷ 25 = 8 </a:t>
             </a:r>
           </a:p>
         </p:txBody>
@@ -8183,7 +8183,7 @@
             <a:pPr algn="ctr"/>
             <a:r>
               <a:rPr lang="en-GB" sz="3200" dirty="0"/>
-              <a:t>15 ÷ 0.01 = 150</a:t>
+              <a:t>15 ÷ 0,01 = 150</a:t>
             </a:r>
           </a:p>
         </p:txBody>
@@ -8464,7 +8464,7 @@
             <a:pPr algn="ctr"/>
             <a:r>
               <a:rPr lang="en-GB" sz="3200" dirty="0"/>
-              <a:t>6 ÷ 0.02 = 200</a:t>
+              <a:t>6 ÷ 0,02 = 200</a:t>
             </a:r>
           </a:p>
         </p:txBody>
@@ -8500,7 +8500,7 @@
             <a:pPr algn="ctr"/>
             <a:r>
               <a:rPr lang="en-GB" sz="3200" dirty="0"/>
-              <a:t>5 ÷ 0.2 = 25</a:t>
+              <a:t>5 ÷ 0,2 = 25</a:t>
             </a:r>
           </a:p>
         </p:txBody>
@@ -9903,7 +9903,7 @@
             <a:pPr algn="ctr"/>
             <a:r>
               <a:rPr lang="en-GB" sz="3200" dirty="0"/>
-              <a:t>7 ÷ 0.1</a:t>
+              <a:t>7 ÷ 0,1</a:t>
             </a:r>
           </a:p>
         </p:txBody>
@@ -10130,7 +10130,7 @@
             <a:pPr algn="ctr"/>
             <a:r>
               <a:rPr lang="en-GB" sz="3200" dirty="0"/>
-              <a:t>6 ÷ 0.2</a:t>
+              <a:t>6 ÷ 0,2</a:t>
             </a:r>
           </a:p>
         </p:txBody>
@@ -10239,7 +10239,7 @@
             <a:pPr algn="ctr"/>
             <a:r>
               <a:rPr lang="en-GB" sz="3200" dirty="0"/>
-              <a:t>2.4 ÷ 0.2</a:t>
+              <a:t>2,4 ÷ 0,2</a:t>
             </a:r>
           </a:p>
         </p:txBody>
@@ -10348,7 +10348,7 @@
             <a:pPr algn="ctr"/>
             <a:r>
               <a:rPr lang="en-GB" sz="3200" dirty="0"/>
-              <a:t>12 ÷ 0.6 = 120 ÷ 6 = 20</a:t>
+              <a:t>12 ÷ 0,6 = 120 ÷ 6 = 20</a:t>
             </a:r>
           </a:p>
         </p:txBody>
@@ -10384,7 +10384,7 @@
             <a:pPr algn="ctr"/>
             <a:r>
               <a:rPr lang="en-GB" sz="3200" dirty="0"/>
-              <a:t>9 ÷ 0.5</a:t>
+              <a:t>9 ÷ 0,5</a:t>
             </a:r>
           </a:p>
         </p:txBody>
@@ -10493,7 +10493,7 @@
             <a:pPr algn="ctr"/>
             <a:r>
               <a:rPr lang="en-GB" sz="3200" dirty="0"/>
-              <a:t>4 ÷ 0.5 = 400 ÷ 5</a:t>
+              <a:t>4 ÷ 0,5 = 400 ÷ 5</a:t>
             </a:r>
           </a:p>
         </p:txBody>
@@ -10529,7 +10529,7 @@
             <a:pPr algn="ctr"/>
             <a:r>
               <a:rPr lang="en-GB" sz="3200" dirty="0"/>
-              <a:t>4 ÷ 0.8 = 5</a:t>
+              <a:t>4 ÷ 0,8 = 5</a:t>
             </a:r>
           </a:p>
         </p:txBody>
@@ -10565,7 +10565,7 @@
             <a:pPr algn="ctr"/>
             <a:r>
               <a:rPr lang="en-GB" sz="3200" dirty="0"/>
-              <a:t>36 ÷ 0.9 = 400</a:t>
+              <a:t>36 ÷ 0,9 = 400</a:t>
             </a:r>
           </a:p>
         </p:txBody>
@@ -10601,7 +10601,7 @@
             <a:pPr algn="ctr"/>
             <a:r>
               <a:rPr lang="en-GB" sz="3200" dirty="0"/>
-              <a:t>2 ÷ 0.25 = 200 ÷ 25 = 8 </a:t>
+              <a:t>2 ÷ 0,25 = 200 ÷ 25 = 8 </a:t>
             </a:r>
           </a:p>
         </p:txBody>
@@ -10637,7 +10637,7 @@
             <a:pPr algn="ctr"/>
             <a:r>
               <a:rPr lang="en-GB" sz="3200" dirty="0"/>
-              <a:t>15 ÷ 0.01 = 150</a:t>
+              <a:t>15 ÷ 0,01 = 150</a:t>
             </a:r>
           </a:p>
         </p:txBody>
@@ -10918,7 +10918,7 @@
             <a:pPr algn="ctr"/>
             <a:r>
               <a:rPr lang="en-GB" sz="3200" dirty="0"/>
-              <a:t>6 ÷ 0.02 = 200</a:t>
+              <a:t>6 ÷ 0,02 = 200</a:t>
             </a:r>
           </a:p>
         </p:txBody>
@@ -10997,7 +10997,7 @@
             <a:pPr algn="ctr"/>
             <a:r>
               <a:rPr lang="en-GB" sz="3200" dirty="0"/>
-              <a:t>5 ÷ 0.2 = 25</a:t>
+              <a:t>5 ÷ 0,2 = 25</a:t>
             </a:r>
           </a:p>
         </p:txBody>
@@ -12938,7 +12938,7 @@
                 <a:ea typeface="+mn-ea"/>
                 <a:cs typeface="+mn-cs"/>
               </a:rPr>
-              <a:t>7 ÷ 0.1</a:t>
+              <a:t>7 ÷ 0,1</a:t>
             </a:r>
           </a:p>
         </p:txBody>
@@ -13260,7 +13260,7 @@
                 <a:ea typeface="+mn-ea"/>
                 <a:cs typeface="+mn-cs"/>
               </a:rPr>
-              <a:t>6 ÷ 0.2</a:t>
+              <a:t>6 ÷ 0,2</a:t>
             </a:r>
           </a:p>
         </p:txBody>
@@ -13469,7 +13469,7 @@
                 <a:ea typeface="+mn-ea"/>
                 <a:cs typeface="+mn-cs"/>
               </a:rPr>
-              <a:t>2.4 ÷ 0.2</a:t>
+              <a:t>2,4 ÷ 0,2</a:t>
             </a:r>
           </a:p>
         </p:txBody>
@@ -13678,7 +13678,7 @@
                 <a:ea typeface="+mn-ea"/>
                 <a:cs typeface="+mn-cs"/>
               </a:rPr>
-              <a:t>12 ÷ 0.6 = 120 ÷ 6 = 20</a:t>
+              <a:t>12 ÷ 0,6 = 120 ÷ 6 = 20</a:t>
             </a:r>
           </a:p>
         </p:txBody>
@@ -13743,7 +13743,7 @@
                 <a:ea typeface="+mn-ea"/>
                 <a:cs typeface="+mn-cs"/>
               </a:rPr>
-              <a:t>9 ÷ 0.5</a:t>
+              <a:t>9 ÷ 0,5</a:t>
             </a:r>
           </a:p>
         </p:txBody>
@@ -13952,7 +13952,7 @@
                 <a:ea typeface="+mn-ea"/>
                 <a:cs typeface="+mn-cs"/>
               </a:rPr>
-              <a:t>4 ÷ 0.5 = 400 ÷ 5</a:t>
+              <a:t>4 ÷ 0,5 = 400 ÷ 5</a:t>
             </a:r>
           </a:p>
         </p:txBody>
@@ -14017,7 +14017,7 @@
                 <a:ea typeface="+mn-ea"/>
                 <a:cs typeface="+mn-cs"/>
               </a:rPr>
-              <a:t>4 ÷ 0.8 = 5</a:t>
+              <a:t>4 ÷ 0,8 = 5</a:t>
             </a:r>
           </a:p>
         </p:txBody>
@@ -14082,7 +14082,7 @@
                 <a:ea typeface="+mn-ea"/>
                 <a:cs typeface="+mn-cs"/>
               </a:rPr>
-              <a:t>36 ÷ 0.9 = 400</a:t>
+              <a:t>36 ÷ 0,9 = 400</a:t>
             </a:r>
           </a:p>
         </p:txBody>
@@ -14147,7 +14147,7 @@
                 <a:ea typeface="+mn-ea"/>
                 <a:cs typeface="+mn-cs"/>
               </a:rPr>
-              <a:t>2 ÷ 0.25 = 200 ÷ 25 = 8 </a:t>
+              <a:t>2 ÷ 0,25 = 200 ÷ 25 = 8 </a:t>
             </a:r>
           </a:p>
         </p:txBody>
@@ -14212,7 +14212,7 @@
                 <a:ea typeface="+mn-ea"/>
                 <a:cs typeface="+mn-cs"/>
               </a:rPr>
-              <a:t>15 ÷ 0.01 = 150</a:t>
+              <a:t>15 ÷ 0,01 = 150</a:t>
             </a:r>
           </a:p>
         </p:txBody>
@@ -14277,7 +14277,7 @@
                 <a:ea typeface="+mn-ea"/>
                 <a:cs typeface="+mn-cs"/>
               </a:rPr>
-              <a:t>6 ÷ 0.02 = 200</a:t>
+              <a:t>6 ÷ 0,02 = 200</a:t>
             </a:r>
           </a:p>
         </p:txBody>
@@ -14342,7 +14342,7 @@
                 <a:ea typeface="+mn-ea"/>
                 <a:cs typeface="+mn-cs"/>
               </a:rPr>
-              <a:t>5 ÷ 0.2 = 25</a:t>
+              <a:t>5 ÷ 0,2 = 25</a:t>
             </a:r>
           </a:p>
         </p:txBody>
